--- a/Claude Code 紹介プレゼン.pptx
+++ b/Claude Code 紹介プレゼン.pptx
@@ -902,7 +902,7 @@
             </a:r>
             <a:r>
               <a:rPr lang="ja-JP" altLang="en-US" dirty="0"/>
-              <a:t>に依頼してみるというのが、うまく使っていくうえで大切なことだと感じました。以上です。</a:t>
+              <a:t>に依頼してみるというのが、うまく使っていくうえで大切なことだと感じました。以上で発表の方を終わります。</a:t>
             </a:r>
             <a:endParaRPr lang="en-US" altLang="ja-JP" dirty="0"/>
           </a:p>
@@ -982,7 +982,15 @@
             </a:r>
             <a:r>
               <a:rPr dirty="0"/>
-              <a:t>。第1章から3章は“個人として使いこなす”段階、第4章から6章は“大規模なコードとチームの品質”に踏み込む段階、第7・8章は“チームへの広げ方と、これからのエンジニア像”を扱います。各章『どんな壁にぶつかり』『Claude Code </a:t>
+              <a:t>。第1章から3章は“個人として使いこなす”段階、第4章から6章は“大規模なコードとチームの品質”に踏み込む段階、第7</a:t>
+            </a:r>
+            <a:r>
+              <a:rPr lang="ja-JP" altLang="en-US" dirty="0"/>
+              <a:t>章</a:t>
+            </a:r>
+            <a:r>
+              <a:rPr dirty="0"/>
+              <a:t>・8章は“チームへの広げ方と、これからのエンジニア像”を扱います。各章『どんな壁にぶつかり』『Claude Code </a:t>
             </a:r>
             <a:r>
               <a:rPr dirty="0" err="1"/>
@@ -1208,11 +1216,18 @@
             </a:r>
             <a:r>
               <a:rPr lang="ja-JP" altLang="en-US" dirty="0"/>
-              <a:t>という存在を教えてくれます。</a:t>
+              <a:t>という存在を教えて</a:t>
+            </a:r>
+            <a:r>
+              <a:rPr lang="ja-JP" altLang="en-US"/>
+              <a:t>くれます。</a:t>
+            </a:r>
+            <a:r>
+              <a:t>使い方はこの</a:t>
             </a:r>
             <a:r>
               <a:rPr dirty="0"/>
-              <a:t>。使い方はこの4ステップ</a:t>
+              <a:t>4ステップ</a:t>
             </a:r>
             <a:r>
               <a:rPr lang="ja-JP" altLang="en-US" dirty="0"/>
@@ -1593,7 +1608,15 @@
             </a:r>
             <a:r>
               <a:rPr dirty="0"/>
-              <a:t>。前任者が辞め、800ファイル10万行を引き継ぐことに</a:t>
+              <a:t>。前任者が辞め、800ファイル</a:t>
+            </a:r>
+            <a:r>
+              <a:rPr lang="ja-JP" altLang="en-US" dirty="0"/>
+              <a:t>以上、</a:t>
+            </a:r>
+            <a:r>
+              <a:rPr dirty="0"/>
+              <a:t>10万行を引き継ぐことに</a:t>
             </a:r>
             <a:r>
               <a:rPr lang="ja-JP" altLang="en-US" dirty="0"/>
